--- a/vector-music-07-corporate-navy.pptx
+++ b/vector-music-07-corporate-navy.pptx
@@ -3830,30 +3830,6 @@
           </a:p>
         </p:txBody>
       </p:sp>
-      <p:pic>
-        <p:nvPicPr>
-          <p:cNvPr id="21" name="Picture 20" descr="vector_ray_t.png"/>
-          <p:cNvPicPr>
-            <a:picLocks noChangeAspect="1"/>
-          </p:cNvPicPr>
-          <p:nvPr/>
-        </p:nvPicPr>
-        <p:blipFill>
-          <a:blip r:embed="rId3"/>
-          <a:stretch>
-            <a:fillRect/>
-          </a:stretch>
-        </p:blipFill>
-        <p:spPr>
-          <a:xfrm>
-            <a:off x="11155680" y="274320"/>
-            <a:ext cx="822960" cy="582402"/>
-          </a:xfrm>
-          <a:prstGeom prst="rect">
-            <a:avLst/>
-          </a:prstGeom>
-        </p:spPr>
-      </p:pic>
     </p:spTree>
   </p:cSld>
   <p:clrMapOvr>
@@ -5679,7 +5655,7 @@
                 </a:solidFill>
                 <a:latin typeface="JetBrains Mono"/>
               </a:rPr>
-              <a:t>4 / 12</a:t>
+              <a:t>4 / 4</a:t>
             </a:r>
           </a:p>
         </p:txBody>
@@ -5692,8 +5668,8 @@
         </p:nvSpPr>
         <p:spPr>
           <a:xfrm>
-            <a:off x="8778240" y="6528816"/>
-            <a:ext cx="2834640" cy="228600"/>
+            <a:off x="7498079" y="6528816"/>
+            <a:ext cx="4114800" cy="228600"/>
           </a:xfrm>
           <a:prstGeom prst="rect">
             <a:avLst/>
@@ -5714,7 +5690,7 @@
                 </a:solidFill>
                 <a:latin typeface="JetBrains Mono"/>
               </a:rPr>
-              <a:t>Vector Legal · Hermes Agent · Osmosy</a:t>
+              <a:t>Vector Music · Hermes Agent · Osmosy</a:t>
             </a:r>
           </a:p>
         </p:txBody>

--- a/vector-music-07-corporate-navy.pptx
+++ b/vector-music-07-corporate-navy.pptx
@@ -3117,6 +3117,54 @@
       </p:pic>
       <p:sp>
         <p:nvSpPr>
+          <p:cNvPr id="20" name="Rounded Rectangle 19"/>
+          <p:cNvSpPr/>
+          <p:nvPr/>
+        </p:nvSpPr>
+        <p:spPr>
+          <a:xfrm>
+            <a:off x="4251960" y="6245352"/>
+            <a:ext cx="3694176" cy="365760"/>
+          </a:xfrm>
+          <a:prstGeom prst="roundRect">
+            <a:avLst>
+              <a:gd name="adj" fmla="val 50000"/>
+            </a:avLst>
+          </a:prstGeom>
+          <a:solidFill>
+            <a:srgbClr val="0F1B2D">
+              <a:alpha val="97000"/>
+            </a:srgbClr>
+          </a:solidFill>
+          <a:ln>
+            <a:noFill/>
+          </a:ln>
+          <a:effectLst/>
+        </p:spPr>
+        <p:style>
+          <a:lnRef idx="1">
+            <a:schemeClr val="accent1"/>
+          </a:lnRef>
+          <a:fillRef idx="3">
+            <a:schemeClr val="accent1"/>
+          </a:fillRef>
+          <a:effectRef idx="2">
+            <a:schemeClr val="accent1"/>
+          </a:effectRef>
+          <a:fontRef idx="minor">
+            <a:schemeClr val="lt1"/>
+          </a:fontRef>
+        </p:style>
+        <p:txBody>
+          <a:bodyPr rtlCol="0" anchor="ctr"/>
+          <a:lstStyle/>
+          <a:p>
+            <a:pPr algn="ctr"/>
+          </a:p>
+        </p:txBody>
+      </p:sp>
+      <p:sp>
+        <p:nvSpPr>
           <p:cNvPr id="3" name="Rectangle 2"/>
           <p:cNvSpPr/>
           <p:nvPr/>
@@ -3797,7 +3845,7 @@
       </p:sp>
       <p:sp>
         <p:nvSpPr>
-          <p:cNvPr id="20" name="TextBox 19"/>
+          <p:cNvPr id="21" name="TextBox 20"/>
           <p:cNvSpPr txBox="1"/>
           <p:nvPr/>
         </p:nvSpPr>
@@ -3830,6 +3878,30 @@
           </a:p>
         </p:txBody>
       </p:sp>
+      <p:pic>
+        <p:nvPicPr>
+          <p:cNvPr id="22" name="Picture 21" descr="vector_ray_t.png"/>
+          <p:cNvPicPr>
+            <a:picLocks noChangeAspect="1"/>
+          </p:cNvPicPr>
+          <p:nvPr/>
+        </p:nvPicPr>
+        <p:blipFill>
+          <a:blip r:embed="rId3"/>
+          <a:stretch>
+            <a:fillRect/>
+          </a:stretch>
+        </p:blipFill>
+        <p:spPr>
+          <a:xfrm>
+            <a:off x="11155680" y="274320"/>
+            <a:ext cx="822960" cy="582402"/>
+          </a:xfrm>
+          <a:prstGeom prst="rect">
+            <a:avLst/>
+          </a:prstGeom>
+        </p:spPr>
+      </p:pic>
     </p:spTree>
   </p:cSld>
   <p:clrMapOvr>
